--- a/classes/parte-12-osint-e-ingenieria-social/254-osint-tecnico-shodan-y-censys/clase-254-presentacion.pptx
+++ b/classes/parte-12-osint-e-ingenieria-social/254-osint-tecnico-shodan-y-censys/clase-254-presentacion.pptx
@@ -18,6 +18,10 @@
     <p:sldId id="266" r:id="rId17"/>
     <p:sldId id="267" r:id="rId18"/>
     <p:sldId id="268" r:id="rId19"/>
+    <p:sldId id="269" r:id="rId20"/>
+    <p:sldId id="270" r:id="rId21"/>
+    <p:sldId id="271" r:id="rId22"/>
+    <p:sldId id="272" r:id="rId23"/>
   </p:sldIdLst>
   <p:sldSz cx="9144000" cy="6858000" type="screen4x3"/>
   <p:notesSz cx="6858000" cy="9144000"/>
@@ -3199,7 +3203,7 @@
                   <a:srgbClr val="0B3D2E"/>
                 </a:solidFill>
               </a:rPr>
-              <a:t>📝 Reto verificable</a:t>
+              <a:t>🧰 Herramientas y preparación</a:t>
             </a:r>
           </a:p>
         </p:txBody>
@@ -3237,52 +3241,52 @@
                   <a:srgbClr val="22282E"/>
                 </a:solidFill>
               </a:rPr>
-              <a:t>•  Entrega un inventario de exposición en Internet de un rango autorizado con: activos, puertos,</a:t>
-            </a:r>
-          </a:p>
-          <a:p>
-            <a:pPr>
-              <a:spcAft>
-                <a:spcPts val="600"/>
-              </a:spcAft>
-            </a:pPr>
-            <a:r>
-              <a:rPr sz="1500">
-                <a:solidFill>
-                  <a:srgbClr val="22282E"/>
-                </a:solidFill>
-              </a:rPr>
-              <a:t>•  servicios de riesgo, atribución por certificado y plan de remediación priorizado.</a:t>
-            </a:r>
-          </a:p>
-          <a:p>
-            <a:pPr>
-              <a:spcAft>
-                <a:spcPts val="600"/>
-              </a:spcAft>
-            </a:pPr>
-            <a:r>
-              <a:rPr sz="1500">
-                <a:solidFill>
-                  <a:srgbClr val="22282E"/>
-                </a:solidFill>
-              </a:rPr>
-              <a:t>•  Criterio de aceptación: cada activo se obtuvo solo por consulta (sin conexión directa), la</a:t>
-            </a:r>
-          </a:p>
-          <a:p>
-            <a:pPr>
-              <a:spcAft>
-                <a:spcPts val="600"/>
-              </a:spcAft>
-            </a:pPr>
-            <a:r>
-              <a:rPr sz="1500">
-                <a:solidFill>
-                  <a:srgbClr val="22282E"/>
-                </a:solidFill>
-              </a:rPr>
-              <a:t>•  atribución está justificada y los ítems críticos tienen acción y responsable propuestos.</a:t>
+              <a:t>•  Cuentas: Shodan (https://www.shodan.io) y Censys (https://search.censys.io), plan gratuito basta para practicar.</a:t>
+            </a:r>
+          </a:p>
+          <a:p>
+            <a:pPr>
+              <a:spcAft>
+                <a:spcPts val="600"/>
+              </a:spcAft>
+            </a:pPr>
+            <a:r>
+              <a:rPr sz="1500">
+                <a:solidFill>
+                  <a:srgbClr val="22282E"/>
+                </a:solidFill>
+              </a:rPr>
+              <a:t>•  CLI: pip install shodan y shodan init &lt;APIKEY&gt;; API de Censys con censys CLI.</a:t>
+            </a:r>
+          </a:p>
+          <a:p>
+            <a:pPr>
+              <a:spcAft>
+                <a:spcPts val="600"/>
+              </a:spcAft>
+            </a:pPr>
+            <a:r>
+              <a:rPr sz="1500">
+                <a:solidFill>
+                  <a:srgbClr val="22282E"/>
+                </a:solidFill>
+              </a:rPr>
+              <a:t>•  Complementos: navegador con la extensión Shodan; nmap para validar (solo sobre activos propios/autorizados).</a:t>
+            </a:r>
+          </a:p>
+          <a:p>
+            <a:pPr>
+              <a:spcAft>
+                <a:spcPts val="600"/>
+              </a:spcAft>
+            </a:pPr>
+            <a:r>
+              <a:rPr sz="1500">
+                <a:solidFill>
+                  <a:srgbClr val="22282E"/>
+                </a:solidFill>
+              </a:rPr>
+              <a:t>•  Recordatorio: consultar es pasivo; conectarse o explotar activos ajenos no lo es y no está permitido.</a:t>
             </a:r>
           </a:p>
         </p:txBody>
@@ -3333,7 +3337,7 @@
                   <a:srgbClr val="0B3D2E"/>
                 </a:solidFill>
               </a:rPr>
-              <a:t>⚠️ Errores comunes</a:t>
+              <a:t>🧪 Laboratorio guiado</a:t>
             </a:r>
           </a:p>
         </p:txBody>
@@ -3371,67 +3375,97 @@
                   <a:srgbClr val="22282E"/>
                 </a:solidFill>
               </a:rPr>
-              <a:t>•  "No information available" — IP no indexada o sin servicios. Verifica el rango o espera reindexado.</a:t>
-            </a:r>
-          </a:p>
-          <a:p>
-            <a:pPr>
-              <a:spcAft>
-                <a:spcPts val="600"/>
-              </a:spcAft>
-            </a:pPr>
-            <a:r>
-              <a:rPr sz="1500">
-                <a:solidFill>
-                  <a:srgbClr val="22282E"/>
-                </a:solidFill>
-              </a:rPr>
-              <a:t>•  Demasiados resultados irrelevantes — Dork poco específico. Añade org, net o product.</a:t>
-            </a:r>
-          </a:p>
-          <a:p>
-            <a:pPr>
-              <a:spcAft>
-                <a:spcPts val="600"/>
-              </a:spcAft>
-            </a:pPr>
-            <a:r>
-              <a:rPr sz="1500">
-                <a:solidFill>
-                  <a:srgbClr val="22282E"/>
-                </a:solidFill>
-              </a:rPr>
-              <a:t>•  Datos desactualizados — El banner es de un escaneo antiguo. Confirma con validación autorizada.</a:t>
-            </a:r>
-          </a:p>
-          <a:p>
-            <a:pPr>
-              <a:spcAft>
-                <a:spcPts val="600"/>
-              </a:spcAft>
-            </a:pPr>
-            <a:r>
-              <a:rPr sz="1500">
-                <a:solidFill>
-                  <a:srgbClr val="22282E"/>
-                </a:solidFill>
-              </a:rPr>
-              <a:t>•  Atribución errónea — IP compartida/hosting. Corrobora con certificado y DNS.</a:t>
-            </a:r>
-          </a:p>
-          <a:p>
-            <a:pPr>
-              <a:spcAft>
-                <a:spcPts val="600"/>
-              </a:spcAft>
-            </a:pPr>
-            <a:r>
-              <a:rPr sz="1500">
-                <a:solidFill>
-                  <a:srgbClr val="22282E"/>
-                </a:solidFill>
-              </a:rPr>
-              <a:t>•  Tentación de conectarse a un hallazgo — Fuera de alcance. Consultar sí, interactuar no; reporta si es de terceros.</a:t>
+              <a:t>•  Objetivo: tu IP pública / activos autorizados y ejemplos de laboratorio.</a:t>
+            </a:r>
+          </a:p>
+          <a:p>
+            <a:pPr>
+              <a:spcAft>
+                <a:spcPts val="600"/>
+              </a:spcAft>
+            </a:pPr>
+            <a:r>
+              <a:rPr sz="1500">
+                <a:solidFill>
+                  <a:srgbClr val="22282E"/>
+                </a:solidFill>
+              </a:rPr>
+              <a:t>•  Averigua tu IP pública y consúltala: shodan host &lt;tuip&gt; — revisa puertos y banners expuestos.</a:t>
+            </a:r>
+          </a:p>
+          <a:p>
+            <a:pPr>
+              <a:spcAft>
+                <a:spcPts val="600"/>
+              </a:spcAft>
+            </a:pPr>
+            <a:r>
+              <a:rPr sz="1500">
+                <a:solidFill>
+                  <a:srgbClr val="22282E"/>
+                </a:solidFill>
+              </a:rPr>
+              <a:t>•  Búsqueda por organización (autorizada): en la web de Shodan, org:"Tu Organizacion".</a:t>
+            </a:r>
+          </a:p>
+          <a:p>
+            <a:pPr>
+              <a:spcAft>
+                <a:spcPts val="600"/>
+              </a:spcAft>
+            </a:pPr>
+            <a:r>
+              <a:rPr sz="1500">
+                <a:solidFill>
+                  <a:srgbClr val="22282E"/>
+                </a:solidFill>
+              </a:rPr>
+              <a:t>•  Filtros combinados: port:3389 org:"Tu Organizacion" para RDP expuesto; product:MongoDB para bases sin auth.</a:t>
+            </a:r>
+          </a:p>
+          <a:p>
+            <a:pPr>
+              <a:spcAft>
+                <a:spcPts val="600"/>
+              </a:spcAft>
+            </a:pPr>
+            <a:r>
+              <a:rPr sz="1500">
+                <a:solidFill>
+                  <a:srgbClr val="22282E"/>
+                </a:solidFill>
+              </a:rPr>
+              <a:t>•  Facets: en Shodan, usa la vista de estadísticas para ver distribución por puerto/país de tu rango.</a:t>
+            </a:r>
+          </a:p>
+          <a:p>
+            <a:pPr>
+              <a:spcAft>
+                <a:spcPts val="600"/>
+              </a:spcAft>
+            </a:pPr>
+            <a:r>
+              <a:rPr sz="1500">
+                <a:solidFill>
+                  <a:srgbClr val="22282E"/>
+                </a:solidFill>
+              </a:rPr>
+              <a:t>•  Censys: busca por certificado services.tls.certificates.leafdata.subject.organization: "Tu Org".</a:t>
+            </a:r>
+          </a:p>
+          <a:p>
+            <a:pPr>
+              <a:spcAft>
+                <a:spcPts val="600"/>
+              </a:spcAft>
+            </a:pPr>
+            <a:r>
+              <a:rPr sz="1500">
+                <a:solidFill>
+                  <a:srgbClr val="22282E"/>
+                </a:solidFill>
+              </a:rPr>
+              <a:t>•  Atribuye activos: correlaciona certificados y banners para confirmar que son tuyos.</a:t>
             </a:r>
           </a:p>
         </p:txBody>
@@ -3482,7 +3516,7 @@
                   <a:srgbClr val="0B3D2E"/>
                 </a:solidFill>
               </a:rPr>
-              <a:t>❓ Preguntas frecuentes</a:t>
+              <a:t>✍️ Ejercicios</a:t>
             </a:r>
           </a:p>
         </p:txBody>
@@ -3520,97 +3554,82 @@
                   <a:srgbClr val="22282E"/>
                 </a:solidFill>
               </a:rPr>
-              <a:t>•  ❓ ¿Es legal usar Shodan?</a:t>
-            </a:r>
-          </a:p>
-          <a:p>
-            <a:pPr>
-              <a:spcAft>
-                <a:spcPts val="600"/>
-              </a:spcAft>
-            </a:pPr>
-            <a:r>
-              <a:rPr sz="1500">
-                <a:solidFill>
-                  <a:srgbClr val="22282E"/>
-                </a:solidFill>
-              </a:rPr>
-              <a:t>•  Sí: indexa información pública. Lo ilegal es interactuar con o explotar sistemas de terceros que</a:t>
-            </a:r>
-          </a:p>
-          <a:p>
-            <a:pPr>
-              <a:spcAft>
-                <a:spcPts val="600"/>
-              </a:spcAft>
-            </a:pPr>
-            <a:r>
-              <a:rPr sz="1500">
-                <a:solidFill>
-                  <a:srgbClr val="22282E"/>
-                </a:solidFill>
-              </a:rPr>
-              <a:t>•  descubras sin autorización.</a:t>
-            </a:r>
-          </a:p>
-          <a:p>
-            <a:pPr>
-              <a:spcAft>
-                <a:spcPts val="600"/>
-              </a:spcAft>
-            </a:pPr>
-            <a:r>
-              <a:rPr sz="1500">
-                <a:solidFill>
-                  <a:srgbClr val="22282E"/>
-                </a:solidFill>
-              </a:rPr>
-              <a:t>•  ❓ ¿Shodan o Censys?</a:t>
-            </a:r>
-          </a:p>
-          <a:p>
-            <a:pPr>
-              <a:spcAft>
-                <a:spcPts val="600"/>
-              </a:spcAft>
-            </a:pPr>
-            <a:r>
-              <a:rPr sz="1500">
-                <a:solidFill>
-                  <a:srgbClr val="22282E"/>
-                </a:solidFill>
-              </a:rPr>
-              <a:t>•  Se complementan. Shodan destaca en IoT/ICS y facilidad; Censys en búsqueda por certificados y datos</a:t>
-            </a:r>
-          </a:p>
-          <a:p>
-            <a:pPr>
-              <a:spcAft>
-                <a:spcPts val="600"/>
-              </a:spcAft>
-            </a:pPr>
-            <a:r>
-              <a:rPr sz="1500">
-                <a:solidFill>
-                  <a:srgbClr val="22282E"/>
-                </a:solidFill>
-              </a:rPr>
-              <a:t>•  estructurados. Usa ambos.</a:t>
-            </a:r>
-          </a:p>
-          <a:p>
-            <a:pPr>
-              <a:spcAft>
-                <a:spcPts val="600"/>
-              </a:spcAft>
-            </a:pPr>
-            <a:r>
-              <a:rPr sz="1500">
-                <a:solidFill>
-                  <a:srgbClr val="22282E"/>
-                </a:solidFill>
-              </a:rPr>
-              <a:t>•  ❓ ¿Los datos son en tiempo real?</a:t>
+              <a:t>•  Escribe 5 dorks de Shodan para servicios de alto riesgo y explica cada filtro.</a:t>
+            </a:r>
+          </a:p>
+          <a:p>
+            <a:pPr>
+              <a:spcAft>
+                <a:spcPts val="600"/>
+              </a:spcAft>
+            </a:pPr>
+            <a:r>
+              <a:rPr sz="1500">
+                <a:solidFill>
+                  <a:srgbClr val="22282E"/>
+                </a:solidFill>
+              </a:rPr>
+              <a:t>•  Compara resultados de Shodan y Censys sobre el mismo activo autorizado.</a:t>
+            </a:r>
+          </a:p>
+          <a:p>
+            <a:pPr>
+              <a:spcAft>
+                <a:spcPts val="600"/>
+              </a:spcAft>
+            </a:pPr>
+            <a:r>
+              <a:rPr sz="1500">
+                <a:solidFill>
+                  <a:srgbClr val="22282E"/>
+                </a:solidFill>
+              </a:rPr>
+              <a:t>•  Usa certificate pivoting en Censys para descubrir activos relacionados.</a:t>
+            </a:r>
+          </a:p>
+          <a:p>
+            <a:pPr>
+              <a:spcAft>
+                <a:spcPts val="600"/>
+              </a:spcAft>
+            </a:pPr>
+            <a:r>
+              <a:rPr sz="1500">
+                <a:solidFill>
+                  <a:srgbClr val="22282E"/>
+                </a:solidFill>
+              </a:rPr>
+              <a:t>•  Interpreta un banner y deduce versión y posible CVE asociado.</a:t>
+            </a:r>
+          </a:p>
+          <a:p>
+            <a:pPr>
+              <a:spcAft>
+                <a:spcPts val="600"/>
+              </a:spcAft>
+            </a:pPr>
+            <a:r>
+              <a:rPr sz="1500">
+                <a:solidFill>
+                  <a:srgbClr val="22282E"/>
+                </a:solidFill>
+              </a:rPr>
+              <a:t>•  Genera un CSV de exposición y clasifícalo por severidad.</a:t>
+            </a:r>
+          </a:p>
+          <a:p>
+            <a:pPr>
+              <a:spcAft>
+                <a:spcPts val="600"/>
+              </a:spcAft>
+            </a:pPr>
+            <a:r>
+              <a:rPr sz="1500">
+                <a:solidFill>
+                  <a:srgbClr val="22282E"/>
+                </a:solidFill>
+              </a:rPr>
+              <a:t>•  Explica por qué encontrar un sistema ICS ajeno obliga a reporte responsable, no a interacción.</a:t>
             </a:r>
           </a:p>
         </p:txBody>
@@ -3661,7 +3680,7 @@
                   <a:srgbClr val="0B3D2E"/>
                 </a:solidFill>
               </a:rPr>
-              <a:t>🔗 Referencias</a:t>
+              <a:t>📝 Reto verificable</a:t>
             </a:r>
           </a:p>
         </p:txBody>
@@ -3699,6 +3718,468 @@
                   <a:srgbClr val="22282E"/>
                 </a:solidFill>
               </a:rPr>
+              <a:t>•  Entrega un inventario de exposición en Internet de un rango autorizado con: activos, puertos,</a:t>
+            </a:r>
+          </a:p>
+          <a:p>
+            <a:pPr>
+              <a:spcAft>
+                <a:spcPts val="600"/>
+              </a:spcAft>
+            </a:pPr>
+            <a:r>
+              <a:rPr sz="1500">
+                <a:solidFill>
+                  <a:srgbClr val="22282E"/>
+                </a:solidFill>
+              </a:rPr>
+              <a:t>•  servicios de riesgo, atribución por certificado y plan de remediación priorizado.</a:t>
+            </a:r>
+          </a:p>
+          <a:p>
+            <a:pPr>
+              <a:spcAft>
+                <a:spcPts val="600"/>
+              </a:spcAft>
+            </a:pPr>
+            <a:r>
+              <a:rPr sz="1500">
+                <a:solidFill>
+                  <a:srgbClr val="22282E"/>
+                </a:solidFill>
+              </a:rPr>
+              <a:t>•  Criterio de aceptación: cada activo se obtuvo solo por consulta (sin conexión directa), la</a:t>
+            </a:r>
+          </a:p>
+          <a:p>
+            <a:pPr>
+              <a:spcAft>
+                <a:spcPts val="600"/>
+              </a:spcAft>
+            </a:pPr>
+            <a:r>
+              <a:rPr sz="1500">
+                <a:solidFill>
+                  <a:srgbClr val="22282E"/>
+                </a:solidFill>
+              </a:rPr>
+              <a:t>•  atribución está justificada y los ítems críticos tienen acción y responsable propuestos.</a:t>
+            </a:r>
+          </a:p>
+        </p:txBody>
+      </p:sp>
+    </p:spTree>
+  </p:cSld>
+  <p:clrMapOvr>
+    <a:masterClrMapping/>
+  </p:clrMapOvr>
+</p:sld>
+</file>
+
+<file path=ppt/slides/slide14.xml><?xml version="1.0" encoding="utf-8"?>
+<p:sld xmlns:a="http://schemas.openxmlformats.org/drawingml/2006/main" xmlns:p="http://schemas.openxmlformats.org/presentationml/2006/main" xmlns:r="http://schemas.openxmlformats.org/officeDocument/2006/relationships">
+  <p:cSld>
+    <p:spTree>
+      <p:nvGrpSpPr>
+        <p:cNvPr id="1" name=""/>
+        <p:cNvGrpSpPr/>
+        <p:nvPr/>
+      </p:nvGrpSpPr>
+      <p:grpSpPr/>
+      <p:sp>
+        <p:nvSpPr>
+          <p:cNvPr id="2" name="TextBox 1"/>
+          <p:cNvSpPr txBox="1"/>
+          <p:nvPr/>
+        </p:nvSpPr>
+        <p:spPr>
+          <a:xfrm>
+            <a:off x="457200" y="320040"/>
+            <a:ext cx="8229600" cy="822960"/>
+          </a:xfrm>
+          <a:prstGeom prst="rect">
+            <a:avLst/>
+          </a:prstGeom>
+          <a:noFill/>
+        </p:spPr>
+        <p:txBody>
+          <a:bodyPr wrap="square">
+            <a:spAutoFit/>
+          </a:bodyPr>
+          <a:lstStyle/>
+          <a:p>
+            <a:r>
+              <a:rPr sz="2600" b="1">
+                <a:solidFill>
+                  <a:srgbClr val="0B3D2E"/>
+                </a:solidFill>
+              </a:rPr>
+              <a:t>⚠️ Errores comunes</a:t>
+            </a:r>
+          </a:p>
+        </p:txBody>
+      </p:sp>
+      <p:sp>
+        <p:nvSpPr>
+          <p:cNvPr id="3" name="TextBox 2"/>
+          <p:cNvSpPr txBox="1"/>
+          <p:nvPr/>
+        </p:nvSpPr>
+        <p:spPr>
+          <a:xfrm>
+            <a:off x="457200" y="1280160"/>
+            <a:ext cx="8229600" cy="4937760"/>
+          </a:xfrm>
+          <a:prstGeom prst="rect">
+            <a:avLst/>
+          </a:prstGeom>
+          <a:noFill/>
+        </p:spPr>
+        <p:txBody>
+          <a:bodyPr wrap="square">
+            <a:spAutoFit/>
+          </a:bodyPr>
+          <a:lstStyle/>
+          <a:p>
+            <a:pPr>
+              <a:spcAft>
+                <a:spcPts val="600"/>
+              </a:spcAft>
+            </a:pPr>
+            <a:r>
+              <a:rPr sz="1500">
+                <a:solidFill>
+                  <a:srgbClr val="22282E"/>
+                </a:solidFill>
+              </a:rPr>
+              <a:t>•  "No information available" — IP no indexada o sin servicios. Verifica el rango o espera reindexado.</a:t>
+            </a:r>
+          </a:p>
+          <a:p>
+            <a:pPr>
+              <a:spcAft>
+                <a:spcPts val="600"/>
+              </a:spcAft>
+            </a:pPr>
+            <a:r>
+              <a:rPr sz="1500">
+                <a:solidFill>
+                  <a:srgbClr val="22282E"/>
+                </a:solidFill>
+              </a:rPr>
+              <a:t>•  Demasiados resultados irrelevantes — Dork poco específico. Añade org, net o product.</a:t>
+            </a:r>
+          </a:p>
+          <a:p>
+            <a:pPr>
+              <a:spcAft>
+                <a:spcPts val="600"/>
+              </a:spcAft>
+            </a:pPr>
+            <a:r>
+              <a:rPr sz="1500">
+                <a:solidFill>
+                  <a:srgbClr val="22282E"/>
+                </a:solidFill>
+              </a:rPr>
+              <a:t>•  Datos desactualizados — El banner es de un escaneo antiguo. Confirma con validación autorizada.</a:t>
+            </a:r>
+          </a:p>
+          <a:p>
+            <a:pPr>
+              <a:spcAft>
+                <a:spcPts val="600"/>
+              </a:spcAft>
+            </a:pPr>
+            <a:r>
+              <a:rPr sz="1500">
+                <a:solidFill>
+                  <a:srgbClr val="22282E"/>
+                </a:solidFill>
+              </a:rPr>
+              <a:t>•  Atribución errónea — IP compartida/hosting. Corrobora con certificado y DNS.</a:t>
+            </a:r>
+          </a:p>
+          <a:p>
+            <a:pPr>
+              <a:spcAft>
+                <a:spcPts val="600"/>
+              </a:spcAft>
+            </a:pPr>
+            <a:r>
+              <a:rPr sz="1500">
+                <a:solidFill>
+                  <a:srgbClr val="22282E"/>
+                </a:solidFill>
+              </a:rPr>
+              <a:t>•  Tentación de conectarse a un hallazgo — Fuera de alcance. Consultar sí, interactuar no; reporta si es de terceros.</a:t>
+            </a:r>
+          </a:p>
+        </p:txBody>
+      </p:sp>
+    </p:spTree>
+  </p:cSld>
+  <p:clrMapOvr>
+    <a:masterClrMapping/>
+  </p:clrMapOvr>
+</p:sld>
+</file>
+
+<file path=ppt/slides/slide15.xml><?xml version="1.0" encoding="utf-8"?>
+<p:sld xmlns:a="http://schemas.openxmlformats.org/drawingml/2006/main" xmlns:p="http://schemas.openxmlformats.org/presentationml/2006/main" xmlns:r="http://schemas.openxmlformats.org/officeDocument/2006/relationships">
+  <p:cSld>
+    <p:spTree>
+      <p:nvGrpSpPr>
+        <p:cNvPr id="1" name=""/>
+        <p:cNvGrpSpPr/>
+        <p:nvPr/>
+      </p:nvGrpSpPr>
+      <p:grpSpPr/>
+      <p:sp>
+        <p:nvSpPr>
+          <p:cNvPr id="2" name="TextBox 1"/>
+          <p:cNvSpPr txBox="1"/>
+          <p:nvPr/>
+        </p:nvSpPr>
+        <p:spPr>
+          <a:xfrm>
+            <a:off x="457200" y="320040"/>
+            <a:ext cx="8229600" cy="822960"/>
+          </a:xfrm>
+          <a:prstGeom prst="rect">
+            <a:avLst/>
+          </a:prstGeom>
+          <a:noFill/>
+        </p:spPr>
+        <p:txBody>
+          <a:bodyPr wrap="square">
+            <a:spAutoFit/>
+          </a:bodyPr>
+          <a:lstStyle/>
+          <a:p>
+            <a:r>
+              <a:rPr sz="2600" b="1">
+                <a:solidFill>
+                  <a:srgbClr val="0B3D2E"/>
+                </a:solidFill>
+              </a:rPr>
+              <a:t>❓ Preguntas frecuentes</a:t>
+            </a:r>
+          </a:p>
+        </p:txBody>
+      </p:sp>
+      <p:sp>
+        <p:nvSpPr>
+          <p:cNvPr id="3" name="TextBox 2"/>
+          <p:cNvSpPr txBox="1"/>
+          <p:nvPr/>
+        </p:nvSpPr>
+        <p:spPr>
+          <a:xfrm>
+            <a:off x="457200" y="1280160"/>
+            <a:ext cx="8229600" cy="4937760"/>
+          </a:xfrm>
+          <a:prstGeom prst="rect">
+            <a:avLst/>
+          </a:prstGeom>
+          <a:noFill/>
+        </p:spPr>
+        <p:txBody>
+          <a:bodyPr wrap="square">
+            <a:spAutoFit/>
+          </a:bodyPr>
+          <a:lstStyle/>
+          <a:p>
+            <a:pPr>
+              <a:spcAft>
+                <a:spcPts val="600"/>
+              </a:spcAft>
+            </a:pPr>
+            <a:r>
+              <a:rPr sz="1500">
+                <a:solidFill>
+                  <a:srgbClr val="22282E"/>
+                </a:solidFill>
+              </a:rPr>
+              <a:t>•  ❓ ¿Es legal usar Shodan?</a:t>
+            </a:r>
+          </a:p>
+          <a:p>
+            <a:pPr>
+              <a:spcAft>
+                <a:spcPts val="600"/>
+              </a:spcAft>
+            </a:pPr>
+            <a:r>
+              <a:rPr sz="1500">
+                <a:solidFill>
+                  <a:srgbClr val="22282E"/>
+                </a:solidFill>
+              </a:rPr>
+              <a:t>•  Sí: indexa información pública. Lo ilegal es interactuar con o explotar sistemas de terceros que</a:t>
+            </a:r>
+          </a:p>
+          <a:p>
+            <a:pPr>
+              <a:spcAft>
+                <a:spcPts val="600"/>
+              </a:spcAft>
+            </a:pPr>
+            <a:r>
+              <a:rPr sz="1500">
+                <a:solidFill>
+                  <a:srgbClr val="22282E"/>
+                </a:solidFill>
+              </a:rPr>
+              <a:t>•  descubras sin autorización.</a:t>
+            </a:r>
+          </a:p>
+          <a:p>
+            <a:pPr>
+              <a:spcAft>
+                <a:spcPts val="600"/>
+              </a:spcAft>
+            </a:pPr>
+            <a:r>
+              <a:rPr sz="1500">
+                <a:solidFill>
+                  <a:srgbClr val="22282E"/>
+                </a:solidFill>
+              </a:rPr>
+              <a:t>•  ❓ ¿Shodan o Censys?</a:t>
+            </a:r>
+          </a:p>
+          <a:p>
+            <a:pPr>
+              <a:spcAft>
+                <a:spcPts val="600"/>
+              </a:spcAft>
+            </a:pPr>
+            <a:r>
+              <a:rPr sz="1500">
+                <a:solidFill>
+                  <a:srgbClr val="22282E"/>
+                </a:solidFill>
+              </a:rPr>
+              <a:t>•  Se complementan. Shodan destaca en IoT/ICS y facilidad; Censys en búsqueda por certificados y datos</a:t>
+            </a:r>
+          </a:p>
+          <a:p>
+            <a:pPr>
+              <a:spcAft>
+                <a:spcPts val="600"/>
+              </a:spcAft>
+            </a:pPr>
+            <a:r>
+              <a:rPr sz="1500">
+                <a:solidFill>
+                  <a:srgbClr val="22282E"/>
+                </a:solidFill>
+              </a:rPr>
+              <a:t>•  estructurados. Usa ambos.</a:t>
+            </a:r>
+          </a:p>
+          <a:p>
+            <a:pPr>
+              <a:spcAft>
+                <a:spcPts val="600"/>
+              </a:spcAft>
+            </a:pPr>
+            <a:r>
+              <a:rPr sz="1500">
+                <a:solidFill>
+                  <a:srgbClr val="22282E"/>
+                </a:solidFill>
+              </a:rPr>
+              <a:t>•  ❓ ¿Los datos son en tiempo real?</a:t>
+            </a:r>
+          </a:p>
+        </p:txBody>
+      </p:sp>
+    </p:spTree>
+  </p:cSld>
+  <p:clrMapOvr>
+    <a:masterClrMapping/>
+  </p:clrMapOvr>
+</p:sld>
+</file>
+
+<file path=ppt/slides/slide16.xml><?xml version="1.0" encoding="utf-8"?>
+<p:sld xmlns:a="http://schemas.openxmlformats.org/drawingml/2006/main" xmlns:p="http://schemas.openxmlformats.org/presentationml/2006/main" xmlns:r="http://schemas.openxmlformats.org/officeDocument/2006/relationships">
+  <p:cSld>
+    <p:spTree>
+      <p:nvGrpSpPr>
+        <p:cNvPr id="1" name=""/>
+        <p:cNvGrpSpPr/>
+        <p:nvPr/>
+      </p:nvGrpSpPr>
+      <p:grpSpPr/>
+      <p:sp>
+        <p:nvSpPr>
+          <p:cNvPr id="2" name="TextBox 1"/>
+          <p:cNvSpPr txBox="1"/>
+          <p:nvPr/>
+        </p:nvSpPr>
+        <p:spPr>
+          <a:xfrm>
+            <a:off x="457200" y="320040"/>
+            <a:ext cx="8229600" cy="822960"/>
+          </a:xfrm>
+          <a:prstGeom prst="rect">
+            <a:avLst/>
+          </a:prstGeom>
+          <a:noFill/>
+        </p:spPr>
+        <p:txBody>
+          <a:bodyPr wrap="square">
+            <a:spAutoFit/>
+          </a:bodyPr>
+          <a:lstStyle/>
+          <a:p>
+            <a:r>
+              <a:rPr sz="2600" b="1">
+                <a:solidFill>
+                  <a:srgbClr val="0B3D2E"/>
+                </a:solidFill>
+              </a:rPr>
+              <a:t>🔗 Referencias</a:t>
+            </a:r>
+          </a:p>
+        </p:txBody>
+      </p:sp>
+      <p:sp>
+        <p:nvSpPr>
+          <p:cNvPr id="3" name="TextBox 2"/>
+          <p:cNvSpPr txBox="1"/>
+          <p:nvPr/>
+        </p:nvSpPr>
+        <p:spPr>
+          <a:xfrm>
+            <a:off x="457200" y="1280160"/>
+            <a:ext cx="8229600" cy="4937760"/>
+          </a:xfrm>
+          <a:prstGeom prst="rect">
+            <a:avLst/>
+          </a:prstGeom>
+          <a:noFill/>
+        </p:spPr>
+        <p:txBody>
+          <a:bodyPr wrap="square">
+            <a:spAutoFit/>
+          </a:bodyPr>
+          <a:lstStyle/>
+          <a:p>
+            <a:pPr>
+              <a:spcAft>
+                <a:spcPts val="600"/>
+              </a:spcAft>
+            </a:pPr>
+            <a:r>
+              <a:rPr sz="1500">
+                <a:solidFill>
+                  <a:srgbClr val="22282E"/>
+                </a:solidFill>
+              </a:rPr>
               <a:t>•  Shodan — Docs. &lt;https://help.shodan.io/&gt;</a:t>
             </a:r>
           </a:p>
@@ -3764,6 +4245,81 @@
           </a:p>
         </p:txBody>
       </p:sp>
+    </p:spTree>
+  </p:cSld>
+  <p:clrMapOvr>
+    <a:masterClrMapping/>
+  </p:clrMapOvr>
+</p:sld>
+</file>
+
+<file path=ppt/slides/slide17.xml><?xml version="1.0" encoding="utf-8"?>
+<p:sld xmlns:a="http://schemas.openxmlformats.org/drawingml/2006/main" xmlns:p="http://schemas.openxmlformats.org/presentationml/2006/main" xmlns:r="http://schemas.openxmlformats.org/officeDocument/2006/relationships">
+  <p:cSld>
+    <p:spTree>
+      <p:nvGrpSpPr>
+        <p:cNvPr id="1" name=""/>
+        <p:cNvGrpSpPr/>
+        <p:nvPr/>
+      </p:nvGrpSpPr>
+      <p:grpSpPr/>
+      <p:sp>
+        <p:nvSpPr>
+          <p:cNvPr id="2" name="TextBox 1"/>
+          <p:cNvSpPr txBox="1"/>
+          <p:nvPr/>
+        </p:nvSpPr>
+        <p:spPr>
+          <a:xfrm>
+            <a:off x="457200" y="274320"/>
+            <a:ext cx="8229600" cy="640080"/>
+          </a:xfrm>
+          <a:prstGeom prst="rect">
+            <a:avLst/>
+          </a:prstGeom>
+          <a:noFill/>
+        </p:spPr>
+        <p:txBody>
+          <a:bodyPr wrap="square">
+            <a:spAutoFit/>
+          </a:bodyPr>
+          <a:lstStyle/>
+          <a:p>
+            <a:r>
+              <a:rPr sz="2200" b="1">
+                <a:solidFill>
+                  <a:srgbClr val="0B3D2E"/>
+                </a:solidFill>
+              </a:rPr>
+              <a:t>Diagrama de la clase</a:t>
+            </a:r>
+          </a:p>
+        </p:txBody>
+      </p:sp>
+      <p:pic>
+        <p:nvPicPr>
+          <p:cNvPr id="3" name="Picture 2" descr="01ab628c75902928.png"/>
+          <p:cNvPicPr>
+            <a:picLocks noChangeAspect="1"/>
+          </p:cNvPicPr>
+          <p:nvPr/>
+        </p:nvPicPr>
+        <p:blipFill>
+          <a:blip r:embed="rId2"/>
+          <a:stretch>
+            <a:fillRect/>
+          </a:stretch>
+        </p:blipFill>
+        <p:spPr>
+          <a:xfrm>
+            <a:off x="457200" y="3140964"/>
+            <a:ext cx="8229600" cy="1216152"/>
+          </a:xfrm>
+          <a:prstGeom prst="rect">
+            <a:avLst/>
+          </a:prstGeom>
+        </p:spPr>
+      </p:pic>
     </p:spTree>
   </p:cSld>
   <p:clrMapOvr>
@@ -4406,7 +4962,7 @@
                   <a:srgbClr val="0B3D2E"/>
                 </a:solidFill>
               </a:rPr>
-              <a:t>📖 Definiciones y características</a:t>
+              <a:t>🧠 Explicación en profundidad</a:t>
             </a:r>
           </a:p>
         </p:txBody>
@@ -4444,82 +5000,82 @@
                   <a:srgbClr val="22282E"/>
                 </a:solidFill>
               </a:rPr>
-              <a:t>•  Banner: respuesta que un servicio muestra al conectar (versión, cabeceras). Característica: base del fingerprinting remoto.</a:t>
-            </a:r>
-          </a:p>
-          <a:p>
-            <a:pPr>
-              <a:spcAft>
-                <a:spcPts val="600"/>
-              </a:spcAft>
-            </a:pPr>
-            <a:r>
-              <a:rPr sz="1500">
-                <a:solidFill>
-                  <a:srgbClr val="22282E"/>
-                </a:solidFill>
-              </a:rPr>
-              <a:t>•  Dork: consulta con filtros específicos. Característica: separa ruido de activos relevantes.</a:t>
-            </a:r>
-          </a:p>
-          <a:p>
-            <a:pPr>
-              <a:spcAft>
-                <a:spcPts val="600"/>
-              </a:spcAft>
-            </a:pPr>
-            <a:r>
-              <a:rPr sz="1500">
-                <a:solidFill>
-                  <a:srgbClr val="22282E"/>
-                </a:solidFill>
-              </a:rPr>
-              <a:t>•  ASN: número de sistema autónomo que agrupa rangos IP de una entidad. Característica: útil para delimitar la superficie.</a:t>
-            </a:r>
-          </a:p>
-          <a:p>
-            <a:pPr>
-              <a:spcAft>
-                <a:spcPts val="600"/>
-              </a:spcAft>
-            </a:pPr>
-            <a:r>
-              <a:rPr sz="1500">
-                <a:solidFill>
-                  <a:srgbClr val="22282E"/>
-                </a:solidFill>
-              </a:rPr>
-              <a:t>•  Certificate pivoting: encontrar activos por el mismo certificado/organización TLS. Característica: revela infraestructura oculta.</a:t>
-            </a:r>
-          </a:p>
-          <a:p>
-            <a:pPr>
-              <a:spcAft>
-                <a:spcPts val="600"/>
-              </a:spcAft>
-            </a:pPr>
-            <a:r>
-              <a:rPr sz="1500">
-                <a:solidFill>
-                  <a:srgbClr val="22282E"/>
-                </a:solidFill>
-              </a:rPr>
-              <a:t>•  ICS/SCADA: sistemas de control industrial expuestos. Característica: hallazgos críticos por su impacto físico.</a:t>
-            </a:r>
-          </a:p>
-          <a:p>
-            <a:pPr>
-              <a:spcAft>
-                <a:spcPts val="600"/>
-              </a:spcAft>
-            </a:pPr>
-            <a:r>
-              <a:rPr sz="1500">
-                <a:solidFill>
-                  <a:srgbClr val="22282E"/>
-                </a:solidFill>
-              </a:rPr>
-              <a:t>•  Facet: agregación estadística de resultados (por país, puerto, producto). Característica: da visión macro de la exposición.</a:t>
+              <a:t>•  Shodan y Censys realizan mediciones y exponen resultados indexados de servicios accesibles. Cada registro depende de cuándo, desde dónde y con qué protocolo se observó. Puede estar desactualizado…</a:t>
+            </a:r>
+          </a:p>
+          <a:p>
+            <a:pPr>
+              <a:spcAft>
+                <a:spcPts val="600"/>
+              </a:spcAft>
+            </a:pPr>
+            <a:r>
+              <a:rPr sz="1500">
+                <a:solidFill>
+                  <a:srgbClr val="22282E"/>
+                </a:solidFill>
+              </a:rPr>
+              <a:t>•  La consulta comienza con identificadores autorizados: dominios propios, certificados, rangos o etiquetas cloud. Buscar por banner genérico produce muchos falsos positivos. Los certificados pueden…</a:t>
+            </a:r>
+          </a:p>
+          <a:p>
+            <a:pPr>
+              <a:spcAft>
+                <a:spcPts val="600"/>
+              </a:spcAft>
+            </a:pPr>
+            <a:r>
+              <a:rPr sz="1500">
+                <a:solidFill>
+                  <a:srgbClr val="22282E"/>
+                </a:solidFill>
+              </a:rPr>
+              <a:t>•  Consultar el índice evita enviar tráfico directo al activo, aunque el proveedor obtuvo los datos mediante mediciones. Validar activamente con nmap, navegador o un cliente ya cambia la interacción y…</a:t>
+            </a:r>
+          </a:p>
+          <a:p>
+            <a:pPr>
+              <a:spcAft>
+                <a:spcPts val="600"/>
+              </a:spcAft>
+            </a:pPr>
+            <a:r>
+              <a:rPr sz="1500">
+                <a:solidFill>
+                  <a:srgbClr val="22282E"/>
+                </a:solidFill>
+              </a:rPr>
+              <a:t>•  Para reducción de superficie se compara el inventario esperado con el observado: puertos, protocolos, certificados y regiones. La diferencia puede revelar un activo desconocido, una entrada antigua o…</a:t>
+            </a:r>
+          </a:p>
+          <a:p>
+            <a:pPr>
+              <a:spcAft>
+                <a:spcPts val="600"/>
+              </a:spcAft>
+            </a:pPr>
+            <a:r>
+              <a:rPr sz="1500">
+                <a:solidFill>
+                  <a:srgbClr val="22282E"/>
+                </a:solidFill>
+              </a:rPr>
+              <a:t>•  Un banner de versión no demuestra que el software sea vulnerable: puede ocultar parches retroportados o ser falso. La asociación con CVE se presenta como candidata hasta verificar producto, versión…</a:t>
+            </a:r>
+          </a:p>
+          <a:p>
+            <a:pPr>
+              <a:spcAft>
+                <a:spcPts val="600"/>
+              </a:spcAft>
+            </a:pPr>
+            <a:r>
+              <a:rPr sz="1500">
+                <a:solidFill>
+                  <a:srgbClr val="22282E"/>
+                </a:solidFill>
+              </a:rPr>
+              <a:t>•  Una búsqueda por dominio de certificado encuentra una IP con MongoDB. RDAP muestra un proveedor cloud y DNS ya no apunta allí; el certificado fue observado meses antes. El analista consulta…</a:t>
             </a:r>
           </a:p>
         </p:txBody>
@@ -4570,7 +5126,7 @@
                   <a:srgbClr val="0B3D2E"/>
                 </a:solidFill>
               </a:rPr>
-              <a:t>🧰 Herramientas y preparación</a:t>
+              <a:t>📔 Glosario operativo</a:t>
             </a:r>
           </a:p>
         </p:txBody>
@@ -4608,52 +5164,82 @@
                   <a:srgbClr val="22282E"/>
                 </a:solidFill>
               </a:rPr>
-              <a:t>•  Cuentas: Shodan (https://www.shodan.io) y Censys (https://search.censys.io), plan gratuito basta para practicar.</a:t>
-            </a:r>
-          </a:p>
-          <a:p>
-            <a:pPr>
-              <a:spcAft>
-                <a:spcPts val="600"/>
-              </a:spcAft>
-            </a:pPr>
-            <a:r>
-              <a:rPr sz="1500">
-                <a:solidFill>
-                  <a:srgbClr val="22282E"/>
-                </a:solidFill>
-              </a:rPr>
-              <a:t>•  CLI: pip install shodan y shodan init &lt;APIKEY&gt;; API de Censys con censys CLI.</a:t>
-            </a:r>
-          </a:p>
-          <a:p>
-            <a:pPr>
-              <a:spcAft>
-                <a:spcPts val="600"/>
-              </a:spcAft>
-            </a:pPr>
-            <a:r>
-              <a:rPr sz="1500">
-                <a:solidFill>
-                  <a:srgbClr val="22282E"/>
-                </a:solidFill>
-              </a:rPr>
-              <a:t>•  Complementos: navegador con la extensión Shodan; nmap para validar (solo sobre activos propios/autorizados).</a:t>
-            </a:r>
-          </a:p>
-          <a:p>
-            <a:pPr>
-              <a:spcAft>
-                <a:spcPts val="600"/>
-              </a:spcAft>
-            </a:pPr>
-            <a:r>
-              <a:rPr sz="1500">
-                <a:solidFill>
-                  <a:srgbClr val="22282E"/>
-                </a:solidFill>
-              </a:rPr>
-              <a:t>•  Recordatorio: consultar es pasivo; conectarse o explotar activos ajenos no lo es y no está permitido.</a:t>
+              <a:t>•  Término — Definición útil</a:t>
+            </a:r>
+          </a:p>
+          <a:p>
+            <a:pPr>
+              <a:spcAft>
+                <a:spcPts val="600"/>
+              </a:spcAft>
+            </a:pPr>
+            <a:r>
+              <a:rPr sz="1500">
+                <a:solidFill>
+                  <a:srgbClr val="22282E"/>
+                </a:solidFill>
+              </a:rPr>
+              <a:t>•  Banner — Respuesta o metadato de servicio; puede ser incompleto o engañoso.</a:t>
+            </a:r>
+          </a:p>
+          <a:p>
+            <a:pPr>
+              <a:spcAft>
+                <a:spcPts val="600"/>
+              </a:spcAft>
+            </a:pPr>
+            <a:r>
+              <a:rPr sz="1500">
+                <a:solidFill>
+                  <a:srgbClr val="22282E"/>
+                </a:solidFill>
+              </a:rPr>
+              <a:t>•  Índice de medición — Base construida con observaciones realizadas en momentos concretos.</a:t>
+            </a:r>
+          </a:p>
+          <a:p>
+            <a:pPr>
+              <a:spcAft>
+                <a:spcPts val="600"/>
+              </a:spcAft>
+            </a:pPr>
+            <a:r>
+              <a:rPr sz="1500">
+                <a:solidFill>
+                  <a:srgbClr val="22282E"/>
+                </a:solidFill>
+              </a:rPr>
+              <a:t>•  Exposición — Servicio accesible desde una posición de red determinada.</a:t>
+            </a:r>
+          </a:p>
+          <a:p>
+            <a:pPr>
+              <a:spcAft>
+                <a:spcPts val="600"/>
+              </a:spcAft>
+            </a:pPr>
+            <a:r>
+              <a:rPr sz="1500">
+                <a:solidFill>
+                  <a:srgbClr val="22282E"/>
+                </a:solidFill>
+              </a:rPr>
+              <a:t>•  Activo candidato — Resultado pendiente de validar propiedad, vigencia y función.</a:t>
+            </a:r>
+          </a:p>
+          <a:p>
+            <a:pPr>
+              <a:spcAft>
+                <a:spcPts val="600"/>
+              </a:spcAft>
+            </a:pPr>
+            <a:r>
+              <a:rPr sz="1500">
+                <a:solidFill>
+                  <a:srgbClr val="22282E"/>
+                </a:solidFill>
+              </a:rPr>
+              <a:t>•  Validación activa — Interacción directa con el servicio, sujeta a autorización.</a:t>
             </a:r>
           </a:p>
         </p:txBody>
@@ -4704,7 +5290,7 @@
                   <a:srgbClr val="0B3D2E"/>
                 </a:solidFill>
               </a:rPr>
-              <a:t>🧪 Laboratorio guiado</a:t>
+              <a:t>✅ Criterio de dominio</a:t>
             </a:r>
           </a:p>
         </p:txBody>
@@ -4742,97 +5328,7 @@
                   <a:srgbClr val="22282E"/>
                 </a:solidFill>
               </a:rPr>
-              <a:t>•  Objetivo: tu IP pública / activos autorizados y ejemplos de laboratorio.</a:t>
-            </a:r>
-          </a:p>
-          <a:p>
-            <a:pPr>
-              <a:spcAft>
-                <a:spcPts val="600"/>
-              </a:spcAft>
-            </a:pPr>
-            <a:r>
-              <a:rPr sz="1500">
-                <a:solidFill>
-                  <a:srgbClr val="22282E"/>
-                </a:solidFill>
-              </a:rPr>
-              <a:t>•  Averigua tu IP pública y consúltala: shodan host &lt;tuip&gt; — revisa puertos y banners expuestos.</a:t>
-            </a:r>
-          </a:p>
-          <a:p>
-            <a:pPr>
-              <a:spcAft>
-                <a:spcPts val="600"/>
-              </a:spcAft>
-            </a:pPr>
-            <a:r>
-              <a:rPr sz="1500">
-                <a:solidFill>
-                  <a:srgbClr val="22282E"/>
-                </a:solidFill>
-              </a:rPr>
-              <a:t>•  Búsqueda por organización (autorizada): en la web de Shodan, org:"Tu Organizacion".</a:t>
-            </a:r>
-          </a:p>
-          <a:p>
-            <a:pPr>
-              <a:spcAft>
-                <a:spcPts val="600"/>
-              </a:spcAft>
-            </a:pPr>
-            <a:r>
-              <a:rPr sz="1500">
-                <a:solidFill>
-                  <a:srgbClr val="22282E"/>
-                </a:solidFill>
-              </a:rPr>
-              <a:t>•  Filtros combinados: port:3389 org:"Tu Organizacion" para RDP expuesto; product:MongoDB para bases sin auth.</a:t>
-            </a:r>
-          </a:p>
-          <a:p>
-            <a:pPr>
-              <a:spcAft>
-                <a:spcPts val="600"/>
-              </a:spcAft>
-            </a:pPr>
-            <a:r>
-              <a:rPr sz="1500">
-                <a:solidFill>
-                  <a:srgbClr val="22282E"/>
-                </a:solidFill>
-              </a:rPr>
-              <a:t>•  Facets: en Shodan, usa la vista de estadísticas para ver distribución por puerto/país de tu rango.</a:t>
-            </a:r>
-          </a:p>
-          <a:p>
-            <a:pPr>
-              <a:spcAft>
-                <a:spcPts val="600"/>
-              </a:spcAft>
-            </a:pPr>
-            <a:r>
-              <a:rPr sz="1500">
-                <a:solidFill>
-                  <a:srgbClr val="22282E"/>
-                </a:solidFill>
-              </a:rPr>
-              <a:t>•  Censys: busca por certificado services.tls.certificates.leafdata.subject.organization: "Tu Org".</a:t>
-            </a:r>
-          </a:p>
-          <a:p>
-            <a:pPr>
-              <a:spcAft>
-                <a:spcPts val="600"/>
-              </a:spcAft>
-            </a:pPr>
-            <a:r>
-              <a:rPr sz="1500">
-                <a:solidFill>
-                  <a:srgbClr val="22282E"/>
-                </a:solidFill>
-              </a:rPr>
-              <a:t>•  Atribuye activos: correlaciona certificados y banners para confirmar que son tuyos.</a:t>
+              <a:t>•  Existe dominio cuando el alumno crea consultas acotadas sobre infraestructura autorizada, registra tiempo y procedencia, valida propiedad y vigencia, separa banner de vulnerabilidad y produce una…</a:t>
             </a:r>
           </a:p>
         </p:txBody>
@@ -4883,7 +5379,7 @@
                   <a:srgbClr val="0B3D2E"/>
                 </a:solidFill>
               </a:rPr>
-              <a:t>✍️ Ejercicios</a:t>
+              <a:t>📖 Definiciones y características</a:t>
             </a:r>
           </a:p>
         </p:txBody>
@@ -4921,82 +5417,82 @@
                   <a:srgbClr val="22282E"/>
                 </a:solidFill>
               </a:rPr>
-              <a:t>•  Escribe 5 dorks de Shodan para servicios de alto riesgo y explica cada filtro.</a:t>
-            </a:r>
-          </a:p>
-          <a:p>
-            <a:pPr>
-              <a:spcAft>
-                <a:spcPts val="600"/>
-              </a:spcAft>
-            </a:pPr>
-            <a:r>
-              <a:rPr sz="1500">
-                <a:solidFill>
-                  <a:srgbClr val="22282E"/>
-                </a:solidFill>
-              </a:rPr>
-              <a:t>•  Compara resultados de Shodan y Censys sobre el mismo activo autorizado.</a:t>
-            </a:r>
-          </a:p>
-          <a:p>
-            <a:pPr>
-              <a:spcAft>
-                <a:spcPts val="600"/>
-              </a:spcAft>
-            </a:pPr>
-            <a:r>
-              <a:rPr sz="1500">
-                <a:solidFill>
-                  <a:srgbClr val="22282E"/>
-                </a:solidFill>
-              </a:rPr>
-              <a:t>•  Usa certificate pivoting en Censys para descubrir activos relacionados.</a:t>
-            </a:r>
-          </a:p>
-          <a:p>
-            <a:pPr>
-              <a:spcAft>
-                <a:spcPts val="600"/>
-              </a:spcAft>
-            </a:pPr>
-            <a:r>
-              <a:rPr sz="1500">
-                <a:solidFill>
-                  <a:srgbClr val="22282E"/>
-                </a:solidFill>
-              </a:rPr>
-              <a:t>•  Interpreta un banner y deduce versión y posible CVE asociado.</a:t>
-            </a:r>
-          </a:p>
-          <a:p>
-            <a:pPr>
-              <a:spcAft>
-                <a:spcPts val="600"/>
-              </a:spcAft>
-            </a:pPr>
-            <a:r>
-              <a:rPr sz="1500">
-                <a:solidFill>
-                  <a:srgbClr val="22282E"/>
-                </a:solidFill>
-              </a:rPr>
-              <a:t>•  Genera un CSV de exposición y clasifícalo por severidad.</a:t>
-            </a:r>
-          </a:p>
-          <a:p>
-            <a:pPr>
-              <a:spcAft>
-                <a:spcPts val="600"/>
-              </a:spcAft>
-            </a:pPr>
-            <a:r>
-              <a:rPr sz="1500">
-                <a:solidFill>
-                  <a:srgbClr val="22282E"/>
-                </a:solidFill>
-              </a:rPr>
-              <a:t>•  Explica por qué encontrar un sistema ICS ajeno obliga a reporte responsable, no a interacción.</a:t>
+              <a:t>•  Banner: respuesta que un servicio muestra al conectar (versión, cabeceras). Característica: base del fingerprinting remoto.</a:t>
+            </a:r>
+          </a:p>
+          <a:p>
+            <a:pPr>
+              <a:spcAft>
+                <a:spcPts val="600"/>
+              </a:spcAft>
+            </a:pPr>
+            <a:r>
+              <a:rPr sz="1500">
+                <a:solidFill>
+                  <a:srgbClr val="22282E"/>
+                </a:solidFill>
+              </a:rPr>
+              <a:t>•  Dork: consulta con filtros específicos. Característica: separa ruido de activos relevantes.</a:t>
+            </a:r>
+          </a:p>
+          <a:p>
+            <a:pPr>
+              <a:spcAft>
+                <a:spcPts val="600"/>
+              </a:spcAft>
+            </a:pPr>
+            <a:r>
+              <a:rPr sz="1500">
+                <a:solidFill>
+                  <a:srgbClr val="22282E"/>
+                </a:solidFill>
+              </a:rPr>
+              <a:t>•  ASN: número de sistema autónomo que agrupa rangos IP de una entidad. Característica: útil para delimitar la superficie.</a:t>
+            </a:r>
+          </a:p>
+          <a:p>
+            <a:pPr>
+              <a:spcAft>
+                <a:spcPts val="600"/>
+              </a:spcAft>
+            </a:pPr>
+            <a:r>
+              <a:rPr sz="1500">
+                <a:solidFill>
+                  <a:srgbClr val="22282E"/>
+                </a:solidFill>
+              </a:rPr>
+              <a:t>•  Certificate pivoting: encontrar activos por el mismo certificado/organización TLS. Característica: revela infraestructura oculta.</a:t>
+            </a:r>
+          </a:p>
+          <a:p>
+            <a:pPr>
+              <a:spcAft>
+                <a:spcPts val="600"/>
+              </a:spcAft>
+            </a:pPr>
+            <a:r>
+              <a:rPr sz="1500">
+                <a:solidFill>
+                  <a:srgbClr val="22282E"/>
+                </a:solidFill>
+              </a:rPr>
+              <a:t>•  ICS/SCADA: sistemas de control industrial expuestos. Característica: hallazgos críticos por su impacto físico.</a:t>
+            </a:r>
+          </a:p>
+          <a:p>
+            <a:pPr>
+              <a:spcAft>
+                <a:spcPts val="600"/>
+              </a:spcAft>
+            </a:pPr>
+            <a:r>
+              <a:rPr sz="1500">
+                <a:solidFill>
+                  <a:srgbClr val="22282E"/>
+                </a:solidFill>
+              </a:rPr>
+              <a:t>•  Facet: agregación estadística de resultados (por país, puerto, producto). Característica: da visión macro de la exposición.</a:t>
             </a:r>
           </a:p>
         </p:txBody>
